--- a/public/pitch-deck.pptx
+++ b/public/pitch-deck.pptx
@@ -15,6 +15,7 @@
     <p:sldId id="262" r:id="rId8"/>
     <p:sldId id="263" r:id="rId9"/>
     <p:sldId id="264" r:id="rId10"/>
+    <p:sldId id="271" r:id="rId22"/>
     <p:sldId id="265" r:id="rId11"/>
     <p:sldId id="266" r:id="rId12"/>
     <p:sldId id="267" r:id="rId13"/>
@@ -4186,7 +4187,7 @@
                 <a:ea typeface="Georgia" pitchFamily="34" charset="-122"/>
                 <a:cs typeface="Georgia" pitchFamily="34" charset="-120"/>
               </a:rPr>
-              <a:t>~0.9 Cr</a:t>
+              <a:t>~₹0.9 Cr</a:t>
             </a:r>
             <a:endParaRPr lang="en-US" sz="1700" dirty="0"/>
           </a:p>
@@ -4250,7 +4251,7 @@
                 <a:ea typeface="Georgia" pitchFamily="34" charset="-122"/>
                 <a:cs typeface="Georgia" pitchFamily="34" charset="-120"/>
               </a:rPr>
-              <a:t>~6.1 Cr</a:t>
+              <a:t>~₹6.1 Cr</a:t>
             </a:r>
             <a:endParaRPr lang="en-US" sz="1700" dirty="0"/>
           </a:p>
@@ -4314,7 +4315,7 @@
                 <a:ea typeface="Georgia" pitchFamily="34" charset="-122"/>
                 <a:cs typeface="Georgia" pitchFamily="34" charset="-120"/>
               </a:rPr>
-              <a:t>~28.5 Cr</a:t>
+              <a:t>~₹28.5 Cr</a:t>
             </a:r>
             <a:endParaRPr lang="en-US" sz="1700" dirty="0"/>
           </a:p>
@@ -6239,6 +6240,767 @@
 </p:sld>
 </file>
 
+<file path=ppt/slides/slide16.xml><?xml version="1.0" encoding="utf-8"?>
+<p:sld xmlns:a="http://schemas.openxmlformats.org/drawingml/2006/main" xmlns:r="http://schemas.openxmlformats.org/officeDocument/2006/relationships" xmlns:p="http://schemas.openxmlformats.org/presentationml/2006/main">
+  <p:cSld name="Slide 5">
+    <p:bg>
+      <p:bgPr>
+        <a:solidFill>
+          <a:srgbClr val="FFFFFF"/>
+        </a:solidFill>
+      </p:bgPr>
+    </p:bg>
+    <p:spTree>
+      <p:nvGrpSpPr>
+        <p:cNvPr id="1" name=""/>
+        <p:cNvGrpSpPr/>
+        <p:nvPr/>
+      </p:nvGrpSpPr>
+      <p:grpSpPr>
+        <a:xfrm>
+          <a:off x="0" y="0"/>
+          <a:ext cx="0" cy="0"/>
+          <a:chOff x="0" y="0"/>
+          <a:chExt cx="0" cy="0"/>
+        </a:xfrm>
+      </p:grpSpPr>
+      <p:sp>
+        <p:nvSpPr>
+          <p:cNvPr id="2" name="Text 0"/>
+          <p:cNvSpPr/>
+          <p:nvPr/>
+        </p:nvSpPr>
+        <p:spPr>
+          <a:xfrm>
+            <a:off x="731520" y="548640"/>
+            <a:ext cx="7315200" cy="274320"/>
+          </a:xfrm>
+          <a:prstGeom prst="rect">
+            <a:avLst/>
+          </a:prstGeom>
+          <a:noFill/>
+          <a:ln/>
+        </p:spPr>
+        <p:txBody>
+          <a:bodyPr wrap="square" rtlCol="0" anchor="ctr"/>
+          <a:lstStyle/>
+          <a:p>
+            <a:pPr indent="0" marL="0">
+              <a:buNone/>
+            </a:pPr>
+            <a:r>
+              <a:rPr lang="en-US" sz="1100" b="1" spc="200" kern="0" dirty="0">
+                <a:solidFill>
+                  <a:srgbClr val="7AB04A"/>
+                </a:solidFill>
+                <a:latin typeface="Calibri" pitchFamily="34" charset="0"/>
+                <a:ea typeface="Calibri" pitchFamily="34" charset="-122"/>
+                <a:cs typeface="Calibri" pitchFamily="34" charset="-120"/>
+              </a:rPr>
+              <a:t>WHY WE WIN</a:t>
+            </a:r>
+            <a:endParaRPr lang="en-US" sz="1100" dirty="0"/>
+          </a:p>
+        </p:txBody>
+      </p:sp>
+      <p:sp>
+        <p:nvSpPr>
+          <p:cNvPr id="3" name="Text 1"/>
+          <p:cNvSpPr/>
+          <p:nvPr/>
+        </p:nvSpPr>
+        <p:spPr>
+          <a:xfrm>
+            <a:off x="731520" y="914400"/>
+            <a:ext cx="10058400" cy="914400"/>
+          </a:xfrm>
+          <a:prstGeom prst="rect">
+            <a:avLst/>
+          </a:prstGeom>
+          <a:noFill/>
+          <a:ln/>
+        </p:spPr>
+        <p:txBody>
+          <a:bodyPr wrap="square" rtlCol="0" anchor="ctr"/>
+          <a:lstStyle/>
+          <a:p>
+            <a:pPr indent="0" marL="0">
+              <a:lnSpc>
+                <a:spcPct val="95000"/>
+              </a:lnSpc>
+              <a:buNone/>
+            </a:pPr>
+            <a:r>
+              <a:rPr lang="en-US" sz="3000" b="1" dirty="0">
+                <a:solidFill>
+                  <a:srgbClr val="1B2417"/>
+                </a:solidFill>
+                <a:latin typeface="Georgia" pitchFamily="34" charset="0"/>
+                <a:ea typeface="Georgia" pitchFamily="34" charset="-122"/>
+                <a:cs typeface="Georgia" pitchFamily="34" charset="-120"/>
+              </a:rPr>
+              <a:t>Pista vs fudr.in — AI is the moat</a:t>
+            </a:r>
+            <a:endParaRPr lang="en-US" sz="3000" dirty="0"/>
+          </a:p>
+        </p:txBody>
+      </p:sp>
+      <p:sp>
+        <p:nvSpPr>
+          <p:cNvPr id="4" name="Shape 2"/>
+          <p:cNvSpPr/>
+          <p:nvPr/>
+        </p:nvSpPr>
+        <p:spPr>
+          <a:xfrm>
+            <a:off x="731520" y="2194560"/>
+            <a:ext cx="3474720" cy="1737360"/>
+          </a:xfrm>
+          <a:prstGeom prst="roundRect">
+            <a:avLst>
+              <a:gd name="adj" fmla="val 4211"/>
+            </a:avLst>
+          </a:prstGeom>
+          <a:solidFill>
+            <a:srgbClr val="F3F8ED"/>
+          </a:solidFill>
+          <a:ln w="12700">
+            <a:solidFill>
+              <a:srgbClr val="D9E4CC"/>
+            </a:solidFill>
+            <a:prstDash val="solid"/>
+          </a:ln>
+        </p:spPr>
+      </p:sp>
+      <p:sp>
+        <p:nvSpPr>
+          <p:cNvPr id="5" name="Text 3"/>
+          <p:cNvSpPr/>
+          <p:nvPr/>
+        </p:nvSpPr>
+        <p:spPr>
+          <a:xfrm>
+            <a:off x="987552" y="2423160"/>
+            <a:ext cx="3017520" cy="457200"/>
+          </a:xfrm>
+          <a:prstGeom prst="rect">
+            <a:avLst/>
+          </a:prstGeom>
+          <a:noFill/>
+          <a:ln/>
+        </p:spPr>
+        <p:txBody>
+          <a:bodyPr wrap="square" rtlCol="0" anchor="ctr"/>
+          <a:lstStyle/>
+          <a:p>
+            <a:pPr indent="0" marL="0">
+              <a:buNone/>
+            </a:pPr>
+            <a:r>
+              <a:rPr lang="en-US" sz="1450" b="1" dirty="0">
+                <a:solidFill>
+                  <a:srgbClr val="15351C"/>
+                </a:solidFill>
+                <a:latin typeface="Calibri" pitchFamily="34" charset="0"/>
+                <a:ea typeface="Calibri" pitchFamily="34" charset="-122"/>
+                <a:cs typeface="Calibri" pitchFamily="34" charset="-120"/>
+              </a:rPr>
+              <a:t>AI ordering assistant</a:t>
+            </a:r>
+            <a:endParaRPr lang="en-US" sz="1450" dirty="0"/>
+          </a:p>
+        </p:txBody>
+      </p:sp>
+      <p:sp>
+        <p:nvSpPr>
+          <p:cNvPr id="6" name="Text 4"/>
+          <p:cNvSpPr/>
+          <p:nvPr/>
+        </p:nvSpPr>
+        <p:spPr>
+          <a:xfrm>
+            <a:off x="987552" y="2907792"/>
+            <a:ext cx="3017520" cy="914400"/>
+          </a:xfrm>
+          <a:prstGeom prst="rect">
+            <a:avLst/>
+          </a:prstGeom>
+          <a:noFill/>
+          <a:ln/>
+        </p:spPr>
+        <p:txBody>
+          <a:bodyPr wrap="square" rtlCol="0" anchor="ctr"/>
+          <a:lstStyle/>
+          <a:p>
+            <a:pPr indent="0" marL="0">
+              <a:lnSpc>
+                <a:spcPct val="105000"/>
+              </a:lnSpc>
+              <a:buNone/>
+            </a:pPr>
+            <a:r>
+              <a:rPr lang="en-US" sz="1150" dirty="0">
+                <a:solidFill>
+                  <a:srgbClr val="5E6B51"/>
+                </a:solidFill>
+                <a:latin typeface="Calibri" pitchFamily="34" charset="0"/>
+                <a:ea typeface="Calibri" pitchFamily="34" charset="-122"/>
+                <a:cs typeface="Calibri" pitchFamily="34" charset="-120"/>
+              </a:rPr>
+              <a:t>Recommends by mood, diet, time of day and caffeine — a conversation, not a static QR menu.</a:t>
+            </a:r>
+            <a:endParaRPr lang="en-US" sz="1150" dirty="0"/>
+          </a:p>
+        </p:txBody>
+      </p:sp>
+      <p:sp>
+        <p:nvSpPr>
+          <p:cNvPr id="7" name="Shape 5"/>
+          <p:cNvSpPr/>
+          <p:nvPr/>
+        </p:nvSpPr>
+        <p:spPr>
+          <a:xfrm>
+            <a:off x="4434840" y="2194560"/>
+            <a:ext cx="3474720" cy="1737360"/>
+          </a:xfrm>
+          <a:prstGeom prst="roundRect">
+            <a:avLst>
+              <a:gd name="adj" fmla="val 4211"/>
+            </a:avLst>
+          </a:prstGeom>
+          <a:solidFill>
+            <a:srgbClr val="F3F8ED"/>
+          </a:solidFill>
+          <a:ln w="12700">
+            <a:solidFill>
+              <a:srgbClr val="D9E4CC"/>
+            </a:solidFill>
+            <a:prstDash val="solid"/>
+          </a:ln>
+        </p:spPr>
+      </p:sp>
+      <p:sp>
+        <p:nvSpPr>
+          <p:cNvPr id="8" name="Text 6"/>
+          <p:cNvSpPr/>
+          <p:nvPr/>
+        </p:nvSpPr>
+        <p:spPr>
+          <a:xfrm>
+            <a:off x="4690872" y="2423160"/>
+            <a:ext cx="3017520" cy="457200"/>
+          </a:xfrm>
+          <a:prstGeom prst="rect">
+            <a:avLst/>
+          </a:prstGeom>
+          <a:noFill/>
+          <a:ln/>
+        </p:spPr>
+        <p:txBody>
+          <a:bodyPr wrap="square" rtlCol="0" anchor="ctr"/>
+          <a:lstStyle/>
+          <a:p>
+            <a:pPr indent="0" marL="0">
+              <a:buNone/>
+            </a:pPr>
+            <a:r>
+              <a:rPr lang="en-US" sz="1450" b="1" dirty="0">
+                <a:solidFill>
+                  <a:srgbClr val="15351C"/>
+                </a:solidFill>
+                <a:latin typeface="Calibri" pitchFamily="34" charset="0"/>
+                <a:ea typeface="Calibri" pitchFamily="34" charset="-122"/>
+                <a:cs typeface="Calibri" pitchFamily="34" charset="-120"/>
+              </a:rPr>
+              <a:t>Food intelligence</a:t>
+            </a:r>
+            <a:endParaRPr lang="en-US" sz="1450" dirty="0"/>
+          </a:p>
+        </p:txBody>
+      </p:sp>
+      <p:sp>
+        <p:nvSpPr>
+          <p:cNvPr id="9" name="Text 7"/>
+          <p:cNvSpPr/>
+          <p:nvPr/>
+        </p:nvSpPr>
+        <p:spPr>
+          <a:xfrm>
+            <a:off x="4690872" y="2907792"/>
+            <a:ext cx="3017520" cy="914400"/>
+          </a:xfrm>
+          <a:prstGeom prst="rect">
+            <a:avLst/>
+          </a:prstGeom>
+          <a:noFill/>
+          <a:ln/>
+        </p:spPr>
+        <p:txBody>
+          <a:bodyPr wrap="square" rtlCol="0" anchor="ctr"/>
+          <a:lstStyle/>
+          <a:p>
+            <a:pPr indent="0" marL="0">
+              <a:lnSpc>
+                <a:spcPct val="105000"/>
+              </a:lnSpc>
+              <a:buNone/>
+            </a:pPr>
+            <a:r>
+              <a:rPr lang="en-US" sz="1150" dirty="0">
+                <a:solidFill>
+                  <a:srgbClr val="5E6B51"/>
+                </a:solidFill>
+                <a:latin typeface="Calibri" pitchFamily="34" charset="0"/>
+                <a:ea typeface="Calibri" pitchFamily="34" charset="-122"/>
+                <a:cs typeface="Calibri" pitchFamily="34" charset="-120"/>
+              </a:rPr>
+              <a:t>Auto origin, ingredients, allergens and nutrition on every item — trust &amp; upsell a QR menu can't carry.</a:t>
+            </a:r>
+            <a:endParaRPr lang="en-US" sz="1150" dirty="0"/>
+          </a:p>
+        </p:txBody>
+      </p:sp>
+      <p:sp>
+        <p:nvSpPr>
+          <p:cNvPr id="10" name="Shape 8"/>
+          <p:cNvSpPr/>
+          <p:nvPr/>
+        </p:nvSpPr>
+        <p:spPr>
+          <a:xfrm>
+            <a:off x="8138160" y="2194560"/>
+            <a:ext cx="3474720" cy="1737360"/>
+          </a:xfrm>
+          <a:prstGeom prst="roundRect">
+            <a:avLst>
+              <a:gd name="adj" fmla="val 4211"/>
+            </a:avLst>
+          </a:prstGeom>
+          <a:solidFill>
+            <a:srgbClr val="F3F8ED"/>
+          </a:solidFill>
+          <a:ln w="12700">
+            <a:solidFill>
+              <a:srgbClr val="D9E4CC"/>
+            </a:solidFill>
+            <a:prstDash val="solid"/>
+          </a:ln>
+        </p:spPr>
+      </p:sp>
+      <p:sp>
+        <p:nvSpPr>
+          <p:cNvPr id="11" name="Text 9"/>
+          <p:cNvSpPr/>
+          <p:nvPr/>
+        </p:nvSpPr>
+        <p:spPr>
+          <a:xfrm>
+            <a:off x="8394192" y="2423160"/>
+            <a:ext cx="3017520" cy="457200"/>
+          </a:xfrm>
+          <a:prstGeom prst="rect">
+            <a:avLst/>
+          </a:prstGeom>
+          <a:noFill/>
+          <a:ln/>
+        </p:spPr>
+        <p:txBody>
+          <a:bodyPr wrap="square" rtlCol="0" anchor="ctr"/>
+          <a:lstStyle/>
+          <a:p>
+            <a:pPr indent="0" marL="0">
+              <a:buNone/>
+            </a:pPr>
+            <a:r>
+              <a:rPr lang="en-US" sz="1450" b="1" dirty="0">
+                <a:solidFill>
+                  <a:srgbClr val="15351C"/>
+                </a:solidFill>
+                <a:latin typeface="Calibri" pitchFamily="34" charset="0"/>
+                <a:ea typeface="Calibri" pitchFamily="34" charset="-122"/>
+                <a:cs typeface="Calibri" pitchFamily="34" charset="-120"/>
+              </a:rPr>
+              <a:t>AI WhatsApp marketing</a:t>
+            </a:r>
+            <a:endParaRPr lang="en-US" sz="1450" dirty="0"/>
+          </a:p>
+        </p:txBody>
+      </p:sp>
+      <p:sp>
+        <p:nvSpPr>
+          <p:cNvPr id="12" name="Text 10"/>
+          <p:cNvSpPr/>
+          <p:nvPr/>
+        </p:nvSpPr>
+        <p:spPr>
+          <a:xfrm>
+            <a:off x="8394192" y="2907792"/>
+            <a:ext cx="3017520" cy="914400"/>
+          </a:xfrm>
+          <a:prstGeom prst="rect">
+            <a:avLst/>
+          </a:prstGeom>
+          <a:noFill/>
+          <a:ln/>
+        </p:spPr>
+        <p:txBody>
+          <a:bodyPr wrap="square" rtlCol="0" anchor="ctr"/>
+          <a:lstStyle/>
+          <a:p>
+            <a:pPr indent="0" marL="0">
+              <a:lnSpc>
+                <a:spcPct val="105000"/>
+              </a:lnSpc>
+              <a:buNone/>
+            </a:pPr>
+            <a:r>
+              <a:rPr lang="en-US" sz="1150" dirty="0">
+                <a:solidFill>
+                  <a:srgbClr val="5E6B51"/>
+                </a:solidFill>
+                <a:latin typeface="Calibri" pitchFamily="34" charset="0"/>
+                <a:ea typeface="Calibri" pitchFamily="34" charset="-122"/>
+                <a:cs typeface="Calibri" pitchFamily="34" charset="-120"/>
+              </a:rPr>
+              <a:t>AI-written personalized campaigns plus automated win-back and reward nudges — a retention engine.</a:t>
+            </a:r>
+            <a:endParaRPr lang="en-US" sz="1150" dirty="0"/>
+          </a:p>
+        </p:txBody>
+      </p:sp>
+      <p:sp>
+        <p:nvSpPr>
+          <p:cNvPr id="13" name="Shape 11"/>
+          <p:cNvSpPr/>
+          <p:nvPr/>
+        </p:nvSpPr>
+        <p:spPr>
+          <a:xfrm>
+            <a:off x="731520" y="4160520"/>
+            <a:ext cx="3474720" cy="1737360"/>
+          </a:xfrm>
+          <a:prstGeom prst="roundRect">
+            <a:avLst>
+              <a:gd name="adj" fmla="val 4211"/>
+            </a:avLst>
+          </a:prstGeom>
+          <a:solidFill>
+            <a:srgbClr val="F3F8ED"/>
+          </a:solidFill>
+          <a:ln w="12700">
+            <a:solidFill>
+              <a:srgbClr val="D9E4CC"/>
+            </a:solidFill>
+            <a:prstDash val="solid"/>
+          </a:ln>
+        </p:spPr>
+      </p:sp>
+      <p:sp>
+        <p:nvSpPr>
+          <p:cNvPr id="14" name="Text 12"/>
+          <p:cNvSpPr/>
+          <p:nvPr/>
+        </p:nvSpPr>
+        <p:spPr>
+          <a:xfrm>
+            <a:off x="987552" y="4389120"/>
+            <a:ext cx="3017520" cy="457200"/>
+          </a:xfrm>
+          <a:prstGeom prst="rect">
+            <a:avLst/>
+          </a:prstGeom>
+          <a:noFill/>
+          <a:ln/>
+        </p:spPr>
+        <p:txBody>
+          <a:bodyPr wrap="square" rtlCol="0" anchor="ctr"/>
+          <a:lstStyle/>
+          <a:p>
+            <a:pPr indent="0" marL="0">
+              <a:buNone/>
+            </a:pPr>
+            <a:r>
+              <a:rPr lang="en-US" sz="1450" b="1" dirty="0">
+                <a:solidFill>
+                  <a:srgbClr val="15351C"/>
+                </a:solidFill>
+                <a:latin typeface="Calibri" pitchFamily="34" charset="0"/>
+                <a:ea typeface="Calibri" pitchFamily="34" charset="-122"/>
+                <a:cs typeface="Calibri" pitchFamily="34" charset="-120"/>
+              </a:rPr>
+              <a:t>AI platform analytics</a:t>
+            </a:r>
+            <a:endParaRPr lang="en-US" sz="1450" dirty="0"/>
+          </a:p>
+        </p:txBody>
+      </p:sp>
+      <p:sp>
+        <p:nvSpPr>
+          <p:cNvPr id="15" name="Text 13"/>
+          <p:cNvSpPr/>
+          <p:nvPr/>
+        </p:nvSpPr>
+        <p:spPr>
+          <a:xfrm>
+            <a:off x="987552" y="4873752"/>
+            <a:ext cx="3017520" cy="914400"/>
+          </a:xfrm>
+          <a:prstGeom prst="rect">
+            <a:avLst/>
+          </a:prstGeom>
+          <a:noFill/>
+          <a:ln/>
+        </p:spPr>
+        <p:txBody>
+          <a:bodyPr wrap="square" rtlCol="0" anchor="ctr"/>
+          <a:lstStyle/>
+          <a:p>
+            <a:pPr indent="0" marL="0">
+              <a:lnSpc>
+                <a:spcPct val="105000"/>
+              </a:lnSpc>
+              <a:buNone/>
+            </a:pPr>
+            <a:r>
+              <a:rPr lang="en-US" sz="1150" dirty="0">
+                <a:solidFill>
+                  <a:srgbClr val="5E6B51"/>
+                </a:solidFill>
+                <a:latin typeface="Calibri" pitchFamily="34" charset="0"/>
+                <a:ea typeface="Calibri" pitchFamily="34" charset="-122"/>
+                <a:cs typeface="Calibri" pitchFamily="34" charset="-120"/>
+              </a:rPr>
+              <a:t>Revenue &amp; MRR trends, a next-month forecast and at-risk cafés, with an AI insight summary.</a:t>
+            </a:r>
+            <a:endParaRPr lang="en-US" sz="1150" dirty="0"/>
+          </a:p>
+        </p:txBody>
+      </p:sp>
+      <p:sp>
+        <p:nvSpPr>
+          <p:cNvPr id="16" name="Shape 14"/>
+          <p:cNvSpPr/>
+          <p:nvPr/>
+        </p:nvSpPr>
+        <p:spPr>
+          <a:xfrm>
+            <a:off x="4434840" y="4160520"/>
+            <a:ext cx="3474720" cy="1737360"/>
+          </a:xfrm>
+          <a:prstGeom prst="roundRect">
+            <a:avLst>
+              <a:gd name="adj" fmla="val 4211"/>
+            </a:avLst>
+          </a:prstGeom>
+          <a:solidFill>
+            <a:srgbClr val="F3F8ED"/>
+          </a:solidFill>
+          <a:ln w="12700">
+            <a:solidFill>
+              <a:srgbClr val="D9E4CC"/>
+            </a:solidFill>
+            <a:prstDash val="solid"/>
+          </a:ln>
+        </p:spPr>
+      </p:sp>
+      <p:sp>
+        <p:nvSpPr>
+          <p:cNvPr id="17" name="Text 15"/>
+          <p:cNvSpPr/>
+          <p:nvPr/>
+        </p:nvSpPr>
+        <p:spPr>
+          <a:xfrm>
+            <a:off x="4690872" y="4389120"/>
+            <a:ext cx="3017520" cy="457200"/>
+          </a:xfrm>
+          <a:prstGeom prst="rect">
+            <a:avLst/>
+          </a:prstGeom>
+          <a:noFill/>
+          <a:ln/>
+        </p:spPr>
+        <p:txBody>
+          <a:bodyPr wrap="square" rtlCol="0" anchor="ctr"/>
+          <a:lstStyle/>
+          <a:p>
+            <a:pPr indent="0" marL="0">
+              <a:buNone/>
+            </a:pPr>
+            <a:r>
+              <a:rPr lang="en-US" sz="1450" b="1" dirty="0">
+                <a:solidFill>
+                  <a:srgbClr val="15351C"/>
+                </a:solidFill>
+                <a:latin typeface="Calibri" pitchFamily="34" charset="0"/>
+                <a:ea typeface="Calibri" pitchFamily="34" charset="-122"/>
+                <a:cs typeface="Calibri" pitchFamily="34" charset="-120"/>
+              </a:rPr>
+              <a:t>True white-label app</a:t>
+            </a:r>
+            <a:endParaRPr lang="en-US" sz="1450" dirty="0"/>
+          </a:p>
+        </p:txBody>
+      </p:sp>
+      <p:sp>
+        <p:nvSpPr>
+          <p:cNvPr id="18" name="Text 16"/>
+          <p:cNvSpPr/>
+          <p:nvPr/>
+        </p:nvSpPr>
+        <p:spPr>
+          <a:xfrm>
+            <a:off x="4690872" y="4873752"/>
+            <a:ext cx="3017520" cy="914400"/>
+          </a:xfrm>
+          <a:prstGeom prst="rect">
+            <a:avLst/>
+          </a:prstGeom>
+          <a:noFill/>
+          <a:ln/>
+        </p:spPr>
+        <p:txBody>
+          <a:bodyPr wrap="square" rtlCol="0" anchor="ctr"/>
+          <a:lstStyle/>
+          <a:p>
+            <a:pPr indent="0" marL="0">
+              <a:lnSpc>
+                <a:spcPct val="105000"/>
+              </a:lnSpc>
+              <a:buNone/>
+            </a:pPr>
+            <a:r>
+              <a:rPr lang="en-US" sz="1150" dirty="0">
+                <a:solidFill>
+                  <a:srgbClr val="5E6B51"/>
+                </a:solidFill>
+                <a:latin typeface="Calibri" pitchFamily="34" charset="0"/>
+                <a:ea typeface="Calibri" pitchFamily="34" charset="-122"/>
+                <a:cs typeface="Calibri" pitchFamily="34" charset="-120"/>
+              </a:rPr>
+              <a:t>Each café's own branded PWA on its own subdomain — not a shared marketplace skin.</a:t>
+            </a:r>
+            <a:endParaRPr lang="en-US" sz="1150" dirty="0"/>
+          </a:p>
+        </p:txBody>
+      </p:sp>
+      <p:sp>
+        <p:nvSpPr>
+          <p:cNvPr id="19" name="Shape 17"/>
+          <p:cNvSpPr/>
+          <p:nvPr/>
+        </p:nvSpPr>
+        <p:spPr>
+          <a:xfrm>
+            <a:off x="8138160" y="4160520"/>
+            <a:ext cx="3474720" cy="1737360"/>
+          </a:xfrm>
+          <a:prstGeom prst="roundRect">
+            <a:avLst>
+              <a:gd name="adj" fmla="val 4211"/>
+            </a:avLst>
+          </a:prstGeom>
+          <a:solidFill>
+            <a:srgbClr val="F3F8ED"/>
+          </a:solidFill>
+          <a:ln w="12700">
+            <a:solidFill>
+              <a:srgbClr val="D9E4CC"/>
+            </a:solidFill>
+            <a:prstDash val="solid"/>
+          </a:ln>
+        </p:spPr>
+      </p:sp>
+      <p:sp>
+        <p:nvSpPr>
+          <p:cNvPr id="20" name="Text 18"/>
+          <p:cNvSpPr/>
+          <p:nvPr/>
+        </p:nvSpPr>
+        <p:spPr>
+          <a:xfrm>
+            <a:off x="8394192" y="4389120"/>
+            <a:ext cx="3017520" cy="457200"/>
+          </a:xfrm>
+          <a:prstGeom prst="rect">
+            <a:avLst/>
+          </a:prstGeom>
+          <a:noFill/>
+          <a:ln/>
+        </p:spPr>
+        <p:txBody>
+          <a:bodyPr wrap="square" rtlCol="0" anchor="ctr"/>
+          <a:lstStyle/>
+          <a:p>
+            <a:pPr indent="0" marL="0">
+              <a:buNone/>
+            </a:pPr>
+            <a:r>
+              <a:rPr lang="en-US" sz="1450" b="1" dirty="0">
+                <a:solidFill>
+                  <a:srgbClr val="15351C"/>
+                </a:solidFill>
+                <a:latin typeface="Calibri" pitchFamily="34" charset="0"/>
+                <a:ea typeface="Calibri" pitchFamily="34" charset="-122"/>
+                <a:cs typeface="Calibri" pitchFamily="34" charset="-120"/>
+              </a:rPr>
+              <a:t>Flat SaaS · 0% commission</a:t>
+            </a:r>
+            <a:endParaRPr lang="en-US" sz="1450" dirty="0"/>
+          </a:p>
+        </p:txBody>
+      </p:sp>
+      <p:sp>
+        <p:nvSpPr>
+          <p:cNvPr id="21" name="Text 19"/>
+          <p:cNvSpPr/>
+          <p:nvPr/>
+        </p:nvSpPr>
+        <p:spPr>
+          <a:xfrm>
+            <a:off x="8394192" y="4873752"/>
+            <a:ext cx="3017520" cy="914400"/>
+          </a:xfrm>
+          <a:prstGeom prst="rect">
+            <a:avLst/>
+          </a:prstGeom>
+          <a:noFill/>
+          <a:ln/>
+        </p:spPr>
+        <p:txBody>
+          <a:bodyPr wrap="square" rtlCol="0" anchor="ctr"/>
+          <a:lstStyle/>
+          <a:p>
+            <a:pPr indent="0" marL="0">
+              <a:lnSpc>
+                <a:spcPct val="105000"/>
+              </a:lnSpc>
+              <a:buNone/>
+            </a:pPr>
+            <a:r>
+              <a:rPr lang="en-US" sz="1150" dirty="0">
+                <a:solidFill>
+                  <a:srgbClr val="5E6B51"/>
+                </a:solidFill>
+                <a:latin typeface="Calibri" pitchFamily="34" charset="0"/>
+                <a:ea typeface="Calibri" pitchFamily="34" charset="-122"/>
+                <a:cs typeface="Calibri" pitchFamily="34" charset="-120"/>
+              </a:rPr>
+              <a:t>Cafés keep 100% of order value and own all their customer data.</a:t>
+            </a:r>
+            <a:endParaRPr lang="en-US" sz="1150" dirty="0"/>
+          </a:p>
+        </p:txBody>
+      </p:sp>
+    </p:spTree>
+  </p:cSld>
+  <p:clrMapOvr>
+    <a:masterClrMapping/>
+  </p:clrMapOvr>
+</p:sld>
+</file>
+
 <file path=ppt/slides/slide2.xml><?xml version="1.0" encoding="utf-8"?>
 <p:sld xmlns:a="http://schemas.openxmlformats.org/drawingml/2006/main" xmlns:r="http://schemas.openxmlformats.org/officeDocument/2006/relationships" xmlns:p="http://schemas.openxmlformats.org/presentationml/2006/main">
   <p:cSld name="Slide 2">
@@ -9782,7 +10544,7 @@
                 <a:ea typeface="Georgia" pitchFamily="34" charset="-122"/>
                 <a:cs typeface="Georgia" pitchFamily="34" charset="-120"/>
               </a:rPr>
-              <a:t>$32B → $140B+</a:t>
+              <a:t>₹2.7L Cr</a:t>
             </a:r>
             <a:endParaRPr lang="en-US" sz="2600" dirty="0"/>
           </a:p>
@@ -9824,7 +10586,7 @@
                 <a:ea typeface="Calibri" pitchFamily="34" charset="-122"/>
                 <a:cs typeface="Calibri" pitchFamily="34" charset="-120"/>
               </a:rPr>
-              <a:t>India online food ordering &amp; delivery (2024→2030, ~28% CAGR)</a:t>
+              <a:t>→ ₹11.7L Cr by 2030 · India online food delivery (~28% CAGR)</a:t>
             </a:r>
             <a:endParaRPr lang="en-US" sz="1200" dirty="0"/>
           </a:p>
@@ -9890,7 +10652,7 @@
                 <a:ea typeface="Georgia" pitchFamily="34" charset="-122"/>
                 <a:cs typeface="Georgia" pitchFamily="34" charset="-120"/>
               </a:rPr>
-              <a:t>$254M → $848M</a:t>
+              <a:t>₹2,100 Cr</a:t>
             </a:r>
             <a:endParaRPr lang="en-US" sz="2600" dirty="0"/>
           </a:p>
@@ -9932,7 +10694,7 @@
                 <a:ea typeface="Calibri" pitchFamily="34" charset="-122"/>
                 <a:cs typeface="Calibri" pitchFamily="34" charset="-120"/>
               </a:rPr>
-              <a:t>India restaurant-tech SaaS — Pista's TAM (2024→2030, 22.8% CAGR)</a:t>
+              <a:t>→ ₹7,050 Cr · India restaurant-tech SaaS TAM (~23% CAGR)</a:t>
             </a:r>
             <a:endParaRPr lang="en-US" sz="1200" dirty="0"/>
           </a:p>
